--- a/skills/presentations/assets/pptx/templates/03-management-effectiveness.pptx
+++ b/skills/presentations/assets/pptx/templates/03-management-effectiveness.pptx
@@ -5,16 +5,16 @@
     <p:sldMasterId xmlns:r="http://schemas.openxmlformats.org/officeDocument/2006/relationships" id="2147483648" r:id="rId1"/>
   </p:sldMasterIdLst>
   <p:notesMasterIdLst>
-    <p:notesMasterId r:id="Rd15bba4c29654d5e"/>
+    <p:notesMasterId r:id="R3ad12cf368e24be4"/>
   </p:notesMasterIdLst>
   <p:sldIdLst>
-    <p:sldId id="256" r:id="R14a053e95f194d10"/>
-    <p:sldId id="257" r:id="R6e3e5e1561fd4e80"/>
-    <p:sldId id="258" r:id="Rd1ea73812ee44c91"/>
-    <p:sldId id="259" r:id="R90030a4770354fa6"/>
-    <p:sldId id="260" r:id="R214214643c224b92"/>
-    <p:sldId id="261" r:id="R63379354f99c4d31"/>
-    <p:sldId id="262" r:id="Rde82998560a343a2"/>
+    <p:sldId id="256" r:id="R396a0a217cbf4fbb"/>
+    <p:sldId id="257" r:id="R6f03abf5c2df4b2a"/>
+    <p:sldId id="258" r:id="R727b4684229d4ec0"/>
+    <p:sldId id="259" r:id="R101d9db909114ad0"/>
+    <p:sldId id="260" r:id="R2a956dccb4214d9c"/>
+    <p:sldId id="261" r:id="R677b3121b3184004"/>
+    <p:sldId id="262" r:id="Rf0950cd156cc4863"/>
   </p:sldIdLst>
   <p:sldSz cx="12192000" cy="6858000"/>
   <p:notesSz cx="6858000" cy="9144000"/>

--- a/skills/presentations/assets/pptx/templates/03-management-effectiveness.pptx
+++ b/skills/presentations/assets/pptx/templates/03-management-effectiveness.pptx
@@ -5,16 +5,17 @@
     <p:sldMasterId xmlns:r="http://schemas.openxmlformats.org/officeDocument/2006/relationships" id="2147483648" r:id="rId1"/>
   </p:sldMasterIdLst>
   <p:notesMasterIdLst>
-    <p:notesMasterId r:id="R3ad12cf368e24be4"/>
+    <p:notesMasterId r:id="Re20d0780d8e8432f"/>
   </p:notesMasterIdLst>
   <p:sldIdLst>
-    <p:sldId id="256" r:id="R396a0a217cbf4fbb"/>
-    <p:sldId id="257" r:id="R6f03abf5c2df4b2a"/>
-    <p:sldId id="258" r:id="R727b4684229d4ec0"/>
-    <p:sldId id="259" r:id="R101d9db909114ad0"/>
-    <p:sldId id="260" r:id="R2a956dccb4214d9c"/>
-    <p:sldId id="261" r:id="R677b3121b3184004"/>
-    <p:sldId id="262" r:id="Rf0950cd156cc4863"/>
+    <p:sldId id="256" r:id="R6f7825b561c54292"/>
+    <p:sldId id="257" r:id="R16b0c535478d4b17"/>
+    <p:sldId id="258" r:id="R987e75f678ab4ce2"/>
+    <p:sldId id="259" r:id="R5af6318ad3d94834"/>
+    <p:sldId id="260" r:id="Rb31886eb64294b21"/>
+    <p:sldId id="261" r:id="R28b0e7db0b3f4fad"/>
+    <p:sldId id="262" r:id="R9efe4600bab04ada"/>
+    <p:sldId id="263" r:id="R94623730ac84442f"/>
   </p:sldIdLst>
   <p:sldSz cx="12192000" cy="6858000"/>
   <p:notesSz cx="6858000" cy="9144000"/>
@@ -480,6 +481,30 @@
               <a:t>Cover (template). Org &amp; people effectiveness</a:t>
             </a:r>
           </a:p>
+          <a:p xmlns:a="http://schemas.openxmlformats.org/drawingml/2006/main">
+            <a:r>
+              <a:rPr lang="en-US"/>
+              <a:t/>
+            </a:r>
+          </a:p>
+          <a:p xmlns:a="http://schemas.openxmlformats.org/drawingml/2006/main">
+            <a:r>
+              <a:rPr lang="en-US"/>
+              <a:t>Team health + capacity scorecard (managing up)</a:t>
+            </a:r>
+          </a:p>
+          <a:p xmlns:a="http://schemas.openxmlformats.org/drawingml/2006/main">
+            <a:r>
+              <a:rPr lang="en-US"/>
+              <a:t>The Engineering Manager — Managing upwards: https://www.theengineeringmanager.com/management-101/managing-upwards/</a:t>
+            </a:r>
+          </a:p>
+          <a:p xmlns:a="http://schemas.openxmlformats.org/drawingml/2006/main">
+            <a:r>
+              <a:rPr lang="en-US"/>
+              <a:t>Netflix culture (public) — talent density language only: https://jobs.netflix.com/culture</a:t>
+            </a:r>
+          </a:p>
         </p:txBody>
       </p:sp>
     </p:spTree>
@@ -532,7 +557,19 @@
           <a:p xmlns:a="http://schemas.openxmlformats.org/drawingml/2006/main">
             <a:r>
               <a:rPr lang="en-US"/>
-              <a:t>End with one clear ask or explicit none.</a:t>
+              <a:t>Team health + capacity scorecard (managing up)</a:t>
+            </a:r>
+          </a:p>
+          <a:p xmlns:a="http://schemas.openxmlformats.org/drawingml/2006/main">
+            <a:r>
+              <a:rPr lang="en-US"/>
+              <a:t>The Engineering Manager — Managing upwards: https://www.theengineeringmanager.com/management-101/managing-upwards/</a:t>
+            </a:r>
+          </a:p>
+          <a:p xmlns:a="http://schemas.openxmlformats.org/drawingml/2006/main">
+            <a:r>
+              <a:rPr lang="en-US"/>
+              <a:t>Netflix culture (public) — talent density language only: https://jobs.netflix.com/culture</a:t>
             </a:r>
           </a:p>
         </p:txBody>
@@ -587,7 +624,7 @@
           <a:p xmlns:a="http://schemas.openxmlformats.org/drawingml/2006/main">
             <a:r>
               <a:rPr lang="en-US"/>
-              <a:t>Scorecard language.</a:t>
+              <a:t>End with one clear ask or explicit none.</a:t>
             </a:r>
           </a:p>
         </p:txBody>
@@ -642,7 +679,7 @@
           <a:p xmlns:a="http://schemas.openxmlformats.org/drawingml/2006/main">
             <a:r>
               <a:rPr lang="en-US"/>
-              <a:t>Do not mix B into this pie unlabeled.</a:t>
+              <a:t>Scorecard language.</a:t>
             </a:r>
           </a:p>
         </p:txBody>
@@ -697,7 +734,7 @@
           <a:p xmlns:a="http://schemas.openxmlformats.org/drawingml/2006/main">
             <a:r>
               <a:rPr lang="en-US"/>
-              <a:t>No public naming/shaming.</a:t>
+              <a:t>Do not mix B into this pie unlabeled.</a:t>
             </a:r>
           </a:p>
         </p:txBody>
@@ -752,7 +789,7 @@
           <a:p xmlns:a="http://schemas.openxmlformats.org/drawingml/2006/main">
             <a:r>
               <a:rPr lang="en-US"/>
-              <a:t>Walk trade-offs; land recommendation.</a:t>
+              <a:t>No public naming/shaming.</a:t>
             </a:r>
           </a:p>
         </p:txBody>
@@ -766,6 +803,61 @@
 </file>
 
 <file path=ppt/notesSlides/notesSlide7.xml><?xml version="1.0" encoding="utf-8"?>
+<p:notes xmlns:p="http://schemas.openxmlformats.org/presentationml/2006/main">
+  <p:cSld>
+    <p:spTree>
+      <p:nvGrpSpPr>
+        <p:cNvPr id="1" name=""/>
+        <p:cNvGrpSpPr/>
+        <p:nvPr/>
+      </p:nvGrpSpPr>
+      <p:grpSpPr>
+        <a:xfrm xmlns:a="http://schemas.openxmlformats.org/drawingml/2006/main"/>
+      </p:grpSpPr>
+      <p:sp>
+        <p:nvSpPr>
+          <p:cNvPr id="2" name="Slide Image Placeholder 1"/>
+          <p:cNvSpPr/>
+          <p:nvPr>
+            <p:ph type="sldImg" idx="0"/>
+          </p:nvPr>
+        </p:nvSpPr>
+        <p:spPr/>
+        <p:txBody>
+          <a:bodyPr xmlns:a="http://schemas.openxmlformats.org/drawingml/2006/main"/>
+          <a:lstStyle xmlns:a="http://schemas.openxmlformats.org/drawingml/2006/main"/>
+          <a:p xmlns:a="http://schemas.openxmlformats.org/drawingml/2006/main"/>
+        </p:txBody>
+      </p:sp>
+      <p:sp>
+        <p:nvSpPr>
+          <p:cNvPr id="3" name="Notes Placeholder 2"/>
+          <p:cNvSpPr/>
+          <p:nvPr>
+            <p:ph type="body" idx="1"/>
+          </p:nvPr>
+        </p:nvSpPr>
+        <p:spPr/>
+        <p:txBody>
+          <a:bodyPr xmlns:a="http://schemas.openxmlformats.org/drawingml/2006/main"/>
+          <a:lstStyle xmlns:a="http://schemas.openxmlformats.org/drawingml/2006/main"/>
+          <a:p xmlns:a="http://schemas.openxmlformats.org/drawingml/2006/main">
+            <a:r>
+              <a:rPr lang="en-US"/>
+              <a:t>Walk trade-offs; land recommendation.</a:t>
+            </a:r>
+          </a:p>
+        </p:txBody>
+      </p:sp>
+    </p:spTree>
+  </p:cSld>
+  <p:clrMapOvr>
+    <a:masterClrMapping xmlns:a="http://schemas.openxmlformats.org/drawingml/2006/main"/>
+  </p:clrMapOvr>
+</p:notes>
+</file>
+
+<file path=ppt/notesSlides/notesSlide8.xml><?xml version="1.0" encoding="utf-8"?>
 <p:notes xmlns:p="http://schemas.openxmlformats.org/presentationml/2006/main">
   <p:cSld>
     <p:spTree>
@@ -1135,8 +1227,8 @@
         </p:nvSpPr>
         <p:spPr>
           <a:xfrm xmlns:a="http://schemas.openxmlformats.org/drawingml/2006/main">
-            <a:off x="504000" y="1008000"/>
-            <a:ext cx="11088000" cy="324000"/>
+            <a:off x="504000" y="936000"/>
+            <a:ext cx="11088000" cy="306000"/>
           </a:xfrm>
           <a:prstGeom xmlns:a="http://schemas.openxmlformats.org/drawingml/2006/main" prst="rect">
             <a:avLst/>
@@ -1167,8 +1259,8 @@
         </p:nvSpPr>
         <p:spPr>
           <a:xfrm xmlns:a="http://schemas.openxmlformats.org/drawingml/2006/main">
-            <a:off x="504000" y="1440000"/>
-            <a:ext cx="11088000" cy="936000"/>
+            <a:off x="504000" y="1332000"/>
+            <a:ext cx="11088000" cy="900000"/>
           </a:xfrm>
           <a:prstGeom xmlns:a="http://schemas.openxmlformats.org/drawingml/2006/main" prst="rect">
             <a:avLst/>
@@ -1179,7 +1271,7 @@
           <a:lstStyle xmlns:a="http://schemas.openxmlformats.org/drawingml/2006/main"/>
           <a:p xmlns:a="http://schemas.openxmlformats.org/drawingml/2006/main">
             <a:r>
-              <a:rPr lang="en-US" sz="3400" b="1">
+              <a:rPr lang="en-US" sz="3200" b="1">
                 <a:solidFill>
                   <a:srgbClr val="FFFFFF"/>
                 </a:solidFill>
@@ -1199,8 +1291,8 @@
         </p:nvSpPr>
         <p:spPr>
           <a:xfrm xmlns:a="http://schemas.openxmlformats.org/drawingml/2006/main">
-            <a:off x="504000" y="2520000"/>
-            <a:ext cx="11088000" cy="720000"/>
+            <a:off x="504000" y="2340000"/>
+            <a:ext cx="11088000" cy="648000"/>
           </a:xfrm>
           <a:prstGeom xmlns:a="http://schemas.openxmlformats.org/drawingml/2006/main" prst="rect">
             <a:avLst/>
@@ -1211,7 +1303,7 @@
           <a:lstStyle xmlns:a="http://schemas.openxmlformats.org/drawingml/2006/main"/>
           <a:p xmlns:a="http://schemas.openxmlformats.org/drawingml/2006/main">
             <a:r>
-              <a:rPr lang="en-US" sz="1700" b="0">
+              <a:rPr lang="en-US" sz="1600" b="0">
                 <a:solidFill>
                   <a:srgbClr val="CADCFC"/>
                 </a:solidFill>
@@ -1226,6 +1318,38 @@
       <p:sp>
         <p:nvSpPr>
           <p:cNvPr id="100003" name="TextBox 4"/>
+          <p:cNvSpPr txBox="1"/>
+          <p:nvPr/>
+        </p:nvSpPr>
+        <p:spPr>
+          <a:xfrm xmlns:a="http://schemas.openxmlformats.org/drawingml/2006/main">
+            <a:off x="504000" y="3240000"/>
+            <a:ext cx="11088000" cy="576000"/>
+          </a:xfrm>
+          <a:prstGeom xmlns:a="http://schemas.openxmlformats.org/drawingml/2006/main" prst="rect">
+            <a:avLst/>
+          </a:prstGeom>
+        </p:spPr>
+        <p:txBody>
+          <a:bodyPr xmlns:a="http://schemas.openxmlformats.org/drawingml/2006/main"/>
+          <a:lstStyle xmlns:a="http://schemas.openxmlformats.org/drawingml/2006/main"/>
+          <a:p xmlns:a="http://schemas.openxmlformats.org/drawingml/2006/main">
+            <a:r>
+              <a:rPr lang="en-US" sz="1400" b="0">
+                <a:solidFill>
+                  <a:srgbClr val="A0C4E8"/>
+                </a:solidFill>
+                <a:latin typeface="Calibri"/>
+                <a:ea typeface="Calibri"/>
+              </a:rPr>
+              <a:t>Pattern: Team health + capacity scorecard (managing up)</a:t>
+            </a:r>
+          </a:p>
+        </p:txBody>
+      </p:sp>
+      <p:sp>
+        <p:nvSpPr>
+          <p:cNvPr id="100004" name="TextBox 5"/>
           <p:cNvSpPr txBox="1"/>
           <p:nvPr/>
         </p:nvSpPr>
@@ -1261,6 +1385,279 @@
 </file>
 
 <file path=ppt/slides/slide2.xml><?xml version="1.0" encoding="utf-8"?>
+<p:sld xmlns:p="http://schemas.openxmlformats.org/presentationml/2006/main">
+  <p:cSld name="Pattern provenance">
+    <p:bg>
+      <p:bgPr>
+        <a:solidFill xmlns:a="http://schemas.openxmlformats.org/drawingml/2006/main">
+          <a:srgbClr val="F4F7FC"/>
+        </a:solidFill>
+      </p:bgPr>
+    </p:bg>
+    <p:spTree>
+      <p:nvGrpSpPr>
+        <p:cNvPr id="1" name=""/>
+        <p:cNvGrpSpPr/>
+        <p:nvPr/>
+      </p:nvGrpSpPr>
+      <p:grpSpPr/>
+      <p:sp>
+        <p:nvSpPr>
+          <p:cNvPr id="100005" name="TextBox 1"/>
+          <p:cNvSpPr txBox="1"/>
+          <p:nvPr/>
+        </p:nvSpPr>
+        <p:spPr>
+          <a:xfrm xmlns:a="http://schemas.openxmlformats.org/drawingml/2006/main">
+            <a:off x="504000" y="270000"/>
+            <a:ext cx="11088000" cy="270000"/>
+          </a:xfrm>
+          <a:prstGeom xmlns:a="http://schemas.openxmlformats.org/drawingml/2006/main" prst="rect">
+            <a:avLst/>
+          </a:prstGeom>
+        </p:spPr>
+        <p:txBody>
+          <a:bodyPr xmlns:a="http://schemas.openxmlformats.org/drawingml/2006/main"/>
+          <a:lstStyle xmlns:a="http://schemas.openxmlformats.org/drawingml/2006/main"/>
+          <a:p xmlns:a="http://schemas.openxmlformats.org/drawingml/2006/main">
+            <a:r>
+              <a:rPr lang="en-US" sz="1100" b="1">
+                <a:solidFill>
+                  <a:srgbClr val="2B6CB0"/>
+                </a:solidFill>
+                <a:latin typeface="Calibri"/>
+                <a:ea typeface="Calibri"/>
+              </a:rPr>
+              <a:t>WHERE THIS DECK SHAPE COMES FROM</a:t>
+            </a:r>
+          </a:p>
+        </p:txBody>
+      </p:sp>
+      <p:sp>
+        <p:nvSpPr>
+          <p:cNvPr id="100006" name="TextBox 2"/>
+          <p:cNvSpPr txBox="1"/>
+          <p:nvPr/>
+        </p:nvSpPr>
+        <p:spPr>
+          <a:xfrm xmlns:a="http://schemas.openxmlformats.org/drawingml/2006/main">
+            <a:off x="504000" y="558000"/>
+            <a:ext cx="11088000" cy="612000"/>
+          </a:xfrm>
+          <a:prstGeom xmlns:a="http://schemas.openxmlformats.org/drawingml/2006/main" prst="rect">
+            <a:avLst/>
+          </a:prstGeom>
+        </p:spPr>
+        <p:txBody>
+          <a:bodyPr xmlns:a="http://schemas.openxmlformats.org/drawingml/2006/main"/>
+          <a:lstStyle xmlns:a="http://schemas.openxmlformats.org/drawingml/2006/main"/>
+          <a:p xmlns:a="http://schemas.openxmlformats.org/drawingml/2006/main">
+            <a:r>
+              <a:rPr lang="en-US" sz="2800" b="1">
+                <a:solidFill>
+                  <a:srgbClr val="1A202C"/>
+                </a:solidFill>
+                <a:latin typeface="Calibri"/>
+                <a:ea typeface="Calibri"/>
+              </a:rPr>
+              <a:t>Pattern provenance</a:t>
+            </a:r>
+          </a:p>
+        </p:txBody>
+      </p:sp>
+      <p:sp>
+        <p:nvSpPr>
+          <p:cNvPr id="100007" name="TextBox 3"/>
+          <p:cNvSpPr txBox="1"/>
+          <p:nvPr/>
+        </p:nvSpPr>
+        <p:spPr>
+          <a:xfrm xmlns:a="http://schemas.openxmlformats.org/drawingml/2006/main">
+            <a:off x="504000" y="1260000"/>
+            <a:ext cx="11088000" cy="4860000"/>
+          </a:xfrm>
+          <a:prstGeom xmlns:a="http://schemas.openxmlformats.org/drawingml/2006/main" prst="rect">
+            <a:avLst/>
+          </a:prstGeom>
+          <a:solidFill xmlns:a="http://schemas.openxmlformats.org/drawingml/2006/main">
+            <a:srgbClr val="FFFFFF"/>
+          </a:solidFill>
+        </p:spPr>
+        <p:txBody>
+          <a:bodyPr xmlns:a="http://schemas.openxmlformats.org/drawingml/2006/main"/>
+          <a:lstStyle xmlns:a="http://schemas.openxmlformats.org/drawingml/2006/main"/>
+          <a:p xmlns:a="http://schemas.openxmlformats.org/drawingml/2006/main">
+            <a:r>
+              <a:rPr lang="en-US" sz="1500" b="0">
+                <a:solidFill>
+                  <a:srgbClr val="1A202C"/>
+                </a:solidFill>
+                <a:latin typeface="Calibri"/>
+                <a:ea typeface="Calibri"/>
+              </a:rPr>
+              <a:t>Public pattern (structure only — not a confidential company deck):</a:t>
+            </a:r>
+          </a:p>
+          <a:p xmlns:a="http://schemas.openxmlformats.org/drawingml/2006/main">
+            <a:r>
+              <a:rPr lang="en-US" sz="1500" b="0">
+                <a:solidFill>
+                  <a:srgbClr val="1A202C"/>
+                </a:solidFill>
+                <a:latin typeface="Calibri"/>
+                <a:ea typeface="Calibri"/>
+              </a:rPr>
+              <a:t/>
+            </a:r>
+          </a:p>
+          <a:p xmlns:a="http://schemas.openxmlformats.org/drawingml/2006/main">
+            <a:r>
+              <a:rPr lang="en-US" sz="1500" b="0">
+                <a:solidFill>
+                  <a:srgbClr val="1A202C"/>
+                </a:solidFill>
+                <a:latin typeface="Calibri"/>
+                <a:ea typeface="Calibri"/>
+              </a:rPr>
+              <a:t>Team health + capacity scorecard (managing up)</a:t>
+            </a:r>
+          </a:p>
+          <a:p xmlns:a="http://schemas.openxmlformats.org/drawingml/2006/main">
+            <a:r>
+              <a:rPr lang="en-US" sz="1500" b="0">
+                <a:solidFill>
+                  <a:srgbClr val="1A202C"/>
+                </a:solidFill>
+                <a:latin typeface="Calibri"/>
+                <a:ea typeface="Calibri"/>
+              </a:rPr>
+              <a:t/>
+            </a:r>
+          </a:p>
+          <a:p xmlns:a="http://schemas.openxmlformats.org/drawingml/2006/main">
+            <a:r>
+              <a:rPr lang="en-US" sz="1500" b="0">
+                <a:solidFill>
+                  <a:srgbClr val="1A202C"/>
+                </a:solidFill>
+                <a:latin typeface="Calibri"/>
+                <a:ea typeface="Calibri"/>
+              </a:rPr>
+              <a:t>• The Engineering Manager — Managing upwards</a:t>
+            </a:r>
+          </a:p>
+          <a:p xmlns:a="http://schemas.openxmlformats.org/drawingml/2006/main">
+            <a:r>
+              <a:rPr lang="en-US" sz="1500" b="0">
+                <a:solidFill>
+                  <a:srgbClr val="1A202C"/>
+                </a:solidFill>
+                <a:latin typeface="Calibri"/>
+                <a:ea typeface="Calibri"/>
+              </a:rPr>
+              <a:t>  https://www.theengineeringmanager.com/management-101/managing-upwards/</a:t>
+            </a:r>
+          </a:p>
+          <a:p xmlns:a="http://schemas.openxmlformats.org/drawingml/2006/main">
+            <a:r>
+              <a:rPr lang="en-US" sz="1500" b="0">
+                <a:solidFill>
+                  <a:srgbClr val="1A202C"/>
+                </a:solidFill>
+                <a:latin typeface="Calibri"/>
+                <a:ea typeface="Calibri"/>
+              </a:rPr>
+              <a:t>• Netflix culture (public) — talent density language only</a:t>
+            </a:r>
+          </a:p>
+          <a:p xmlns:a="http://schemas.openxmlformats.org/drawingml/2006/main">
+            <a:r>
+              <a:rPr lang="en-US" sz="1500" b="0">
+                <a:solidFill>
+                  <a:srgbClr val="1A202C"/>
+                </a:solidFill>
+                <a:latin typeface="Calibri"/>
+                <a:ea typeface="Calibri"/>
+              </a:rPr>
+              <a:t>  https://jobs.netflix.com/culture</a:t>
+            </a:r>
+          </a:p>
+          <a:p xmlns:a="http://schemas.openxmlformats.org/drawingml/2006/main">
+            <a:r>
+              <a:rPr lang="en-US" sz="1500" b="0">
+                <a:solidFill>
+                  <a:srgbClr val="1A202C"/>
+                </a:solidFill>
+                <a:latin typeface="Calibri"/>
+                <a:ea typeface="Calibri"/>
+              </a:rPr>
+              <a:t/>
+            </a:r>
+          </a:p>
+          <a:p xmlns:a="http://schemas.openxmlformats.org/drawingml/2006/main">
+            <a:r>
+              <a:rPr lang="en-US" sz="1500" b="0">
+                <a:solidFill>
+                  <a:srgbClr val="1A202C"/>
+                </a:solidFill>
+                <a:latin typeface="Calibri"/>
+                <a:ea typeface="Calibri"/>
+              </a:rPr>
+              <a:t>How to use: copy section order and decision verbs; replace with your metrics.</a:t>
+            </a:r>
+          </a:p>
+          <a:p xmlns:a="http://schemas.openxmlformats.org/drawingml/2006/main">
+            <a:r>
+              <a:rPr lang="en-US" sz="1500" b="0">
+                <a:solidFill>
+                  <a:srgbClr val="1A202C"/>
+                </a:solidFill>
+                <a:latin typeface="Calibri"/>
+                <a:ea typeface="Calibri"/>
+              </a:rPr>
+              <a:t>In-repo: skills/presentations/classic-public-cases.md</a:t>
+            </a:r>
+          </a:p>
+        </p:txBody>
+      </p:sp>
+      <p:sp>
+        <p:nvSpPr>
+          <p:cNvPr id="100008" name="TextBox 4"/>
+          <p:cNvSpPr txBox="1"/>
+          <p:nvPr/>
+        </p:nvSpPr>
+        <p:spPr>
+          <a:xfrm xmlns:a="http://schemas.openxmlformats.org/drawingml/2006/main">
+            <a:off x="504000" y="6426000"/>
+            <a:ext cx="11088000" cy="306000"/>
+          </a:xfrm>
+          <a:prstGeom xmlns:a="http://schemas.openxmlformats.org/drawingml/2006/main" prst="rect">
+            <a:avLst/>
+          </a:prstGeom>
+        </p:spPr>
+        <p:txBody>
+          <a:bodyPr xmlns:a="http://schemas.openxmlformats.org/drawingml/2006/main"/>
+          <a:lstStyle xmlns:a="http://schemas.openxmlformats.org/drawingml/2006/main"/>
+          <a:p xmlns:a="http://schemas.openxmlformats.org/drawingml/2006/main">
+            <a:r>
+              <a:rPr lang="en-US" sz="1100" b="0">
+                <a:solidFill>
+                  <a:srgbClr val="718096"/>
+                </a:solidFill>
+                <a:latin typeface="Calibri"/>
+                <a:ea typeface="Calibri"/>
+              </a:rPr>
+              <a:t>Team X  ·  Program Alpha  ·  Qn YYYY  ·  TEMPLATE — replace placeholders</a:t>
+            </a:r>
+          </a:p>
+        </p:txBody>
+      </p:sp>
+    </p:spTree>
+  </p:cSld>
+</p:sld>
+</file>
+
+<file path=ppt/slides/slide3.xml><?xml version="1.0" encoding="utf-8"?>
 <p:sld xmlns:p="http://schemas.openxmlformats.org/presentationml/2006/main">
   <p:cSld name="BLUF — team health">
     <p:bg>
@@ -1279,7 +1676,7 @@
       <p:grpSpPr/>
       <p:sp>
         <p:nvSpPr>
-          <p:cNvPr id="100004" name="TextBox 1"/>
+          <p:cNvPr id="100009" name="TextBox 1"/>
           <p:cNvSpPr txBox="1"/>
           <p:nvPr/>
         </p:nvSpPr>
@@ -1311,7 +1708,7 @@
       </p:sp>
       <p:sp>
         <p:nvSpPr>
-          <p:cNvPr id="100005" name="TextBox 2"/>
+          <p:cNvPr id="100010" name="TextBox 2"/>
           <p:cNvSpPr txBox="1"/>
           <p:nvPr/>
         </p:nvSpPr>
@@ -1343,7 +1740,7 @@
       </p:sp>
       <p:sp>
         <p:nvSpPr>
-          <p:cNvPr id="100006" name="TextBox 3"/>
+          <p:cNvPr id="100011" name="TextBox 3"/>
           <p:cNvSpPr txBox="1"/>
           <p:nvPr/>
         </p:nvSpPr>
@@ -1378,7 +1775,7 @@
       </p:sp>
       <p:sp>
         <p:nvSpPr>
-          <p:cNvPr id="100007" name="TextBox 4"/>
+          <p:cNvPr id="100012" name="TextBox 4"/>
           <p:cNvSpPr txBox="1"/>
           <p:nvPr/>
         </p:nvSpPr>
@@ -1461,7 +1858,7 @@
       </p:sp>
       <p:sp>
         <p:nvSpPr>
-          <p:cNvPr id="100008" name="TextBox 5"/>
+          <p:cNvPr id="100013" name="TextBox 5"/>
           <p:cNvSpPr txBox="1"/>
           <p:nvPr/>
         </p:nvSpPr>
@@ -1496,7 +1893,7 @@
 </p:sld>
 </file>
 
-<file path=ppt/slides/slide3.xml><?xml version="1.0" encoding="utf-8"?>
+<file path=ppt/slides/slide4.xml><?xml version="1.0" encoding="utf-8"?>
 <p:sld xmlns:p="http://schemas.openxmlformats.org/presentationml/2006/main">
   <p:cSld name="Outcomes vs commits">
     <p:bg>
@@ -1515,7 +1912,7 @@
       <p:grpSpPr/>
       <p:sp>
         <p:nvSpPr>
-          <p:cNvPr id="100009" name="TextBox 1"/>
+          <p:cNvPr id="100014" name="TextBox 1"/>
           <p:cNvSpPr txBox="1"/>
           <p:nvPr/>
         </p:nvSpPr>
@@ -1547,7 +1944,7 @@
       </p:sp>
       <p:sp>
         <p:nvSpPr>
-          <p:cNvPr id="100010" name="TextBox 2"/>
+          <p:cNvPr id="100015" name="TextBox 2"/>
           <p:cNvSpPr txBox="1"/>
           <p:nvPr/>
         </p:nvSpPr>
@@ -1606,7 +2003,7 @@
       </p:sp>
       <p:sp>
         <p:nvSpPr>
-          <p:cNvPr id="100011" name="TextBox 3"/>
+          <p:cNvPr id="100016" name="TextBox 3"/>
           <p:cNvSpPr txBox="1"/>
           <p:nvPr/>
         </p:nvSpPr>
@@ -1641,7 +2038,7 @@
 </p:sld>
 </file>
 
-<file path=ppt/slides/slide4.xml><?xml version="1.0" encoding="utf-8"?>
+<file path=ppt/slides/slide5.xml><?xml version="1.0" encoding="utf-8"?>
 <p:sld xmlns:p="http://schemas.openxmlformats.org/presentationml/2006/main">
   <p:cSld name="Capacity reality (context A)">
     <p:bg>
@@ -1660,7 +2057,7 @@
       <p:grpSpPr/>
       <p:sp>
         <p:nvSpPr>
-          <p:cNvPr id="100012" name="TextBox 1"/>
+          <p:cNvPr id="100017" name="TextBox 1"/>
           <p:cNvSpPr txBox="1"/>
           <p:nvPr/>
         </p:nvSpPr>
@@ -1692,7 +2089,7 @@
       </p:sp>
       <p:sp>
         <p:nvSpPr>
-          <p:cNvPr id="100013" name="TextBox 2"/>
+          <p:cNvPr id="100018" name="TextBox 2"/>
           <p:cNvSpPr txBox="1"/>
           <p:nvPr/>
         </p:nvSpPr>
@@ -1787,7 +2184,7 @@
       </p:sp>
       <p:sp>
         <p:nvSpPr>
-          <p:cNvPr id="100014" name="TextBox 3"/>
+          <p:cNvPr id="100019" name="TextBox 3"/>
           <p:cNvSpPr txBox="1"/>
           <p:nvPr/>
         </p:nvSpPr>
@@ -1822,7 +2219,7 @@
 </p:sld>
 </file>
 
-<file path=ppt/slides/slide5.xml><?xml version="1.0" encoding="utf-8"?>
+<file path=ppt/slides/slide6.xml><?xml version="1.0" encoding="utf-8"?>
 <p:sld xmlns:p="http://schemas.openxmlformats.org/presentationml/2006/main">
   <p:cSld name="People &amp; capability">
     <p:bg>
@@ -1841,7 +2238,7 @@
       <p:grpSpPr/>
       <p:sp>
         <p:nvSpPr>
-          <p:cNvPr id="100015" name="TextBox 1"/>
+          <p:cNvPr id="100020" name="TextBox 1"/>
           <p:cNvSpPr txBox="1"/>
           <p:nvPr/>
         </p:nvSpPr>
@@ -1873,7 +2270,7 @@
       </p:sp>
       <p:sp>
         <p:nvSpPr>
-          <p:cNvPr id="100016" name="TextBox 2"/>
+          <p:cNvPr id="100021" name="TextBox 2"/>
           <p:cNvSpPr txBox="1"/>
           <p:nvPr/>
         </p:nvSpPr>
@@ -1932,7 +2329,7 @@
       </p:sp>
       <p:sp>
         <p:nvSpPr>
-          <p:cNvPr id="100017" name="TextBox 3"/>
+          <p:cNvPr id="100022" name="TextBox 3"/>
           <p:cNvSpPr txBox="1"/>
           <p:nvPr/>
         </p:nvSpPr>
@@ -1967,7 +2364,7 @@
 </p:sld>
 </file>
 
-<file path=ppt/slides/slide6.xml><?xml version="1.0" encoding="utf-8"?>
+<file path=ppt/slides/slide7.xml><?xml version="1.0" encoding="utf-8"?>
 <p:sld xmlns:p="http://schemas.openxmlformats.org/presentationml/2006/main">
   <p:cSld name="Options &amp; recommendation">
     <p:bg>
@@ -1986,7 +2383,7 @@
       <p:grpSpPr/>
       <p:sp>
         <p:nvSpPr>
-          <p:cNvPr id="100018" name="TextBox 1"/>
+          <p:cNvPr id="100023" name="TextBox 1"/>
           <p:cNvSpPr txBox="1"/>
           <p:nvPr/>
         </p:nvSpPr>
@@ -2018,7 +2415,7 @@
       </p:sp>
       <p:sp>
         <p:nvSpPr>
-          <p:cNvPr id="100019" name="TextBox 2"/>
+          <p:cNvPr id="100024" name="TextBox 2"/>
           <p:cNvSpPr txBox="1"/>
           <p:nvPr/>
         </p:nvSpPr>
@@ -2050,7 +2447,7 @@
       </p:sp>
       <p:graphicFrame>
         <p:nvGraphicFramePr>
-          <p:cNvPr id="100020" name="Table 1"/>
+          <p:cNvPr id="100025" name="Table 1"/>
           <p:cNvGraphicFramePr/>
           <p:nvPr/>
         </p:nvGraphicFramePr>
@@ -2357,7 +2754,7 @@
       </p:graphicFrame>
       <p:sp>
         <p:nvSpPr>
-          <p:cNvPr id="100021" name="TextBox 3"/>
+          <p:cNvPr id="100026" name="TextBox 3"/>
           <p:cNvSpPr txBox="1"/>
           <p:nvPr/>
         </p:nvSpPr>
@@ -2392,7 +2789,7 @@
 </p:sld>
 </file>
 
-<file path=ppt/slides/slide7.xml><?xml version="1.0" encoding="utf-8"?>
+<file path=ppt/slides/slide8.xml><?xml version="1.0" encoding="utf-8"?>
 <p:sld xmlns:p="http://schemas.openxmlformats.org/presentationml/2006/main">
   <p:cSld name="Decision &amp; ask">
     <p:bg>
@@ -2411,7 +2808,7 @@
       <p:grpSpPr/>
       <p:sp>
         <p:nvSpPr>
-          <p:cNvPr id="100022" name="TextBox 1"/>
+          <p:cNvPr id="100027" name="TextBox 1"/>
           <p:cNvSpPr txBox="1"/>
           <p:nvPr/>
         </p:nvSpPr>
@@ -2443,7 +2840,7 @@
       </p:sp>
       <p:sp>
         <p:nvSpPr>
-          <p:cNvPr id="100023" name="TextBox 2"/>
+          <p:cNvPr id="100028" name="TextBox 2"/>
           <p:cNvSpPr txBox="1"/>
           <p:nvPr/>
         </p:nvSpPr>
@@ -2475,7 +2872,7 @@
       </p:sp>
       <p:sp>
         <p:nvSpPr>
-          <p:cNvPr id="100024" name="TextBox 3"/>
+          <p:cNvPr id="100029" name="TextBox 3"/>
           <p:cNvSpPr txBox="1"/>
           <p:nvPr/>
         </p:nvSpPr>
@@ -2534,7 +2931,7 @@
       </p:sp>
       <p:sp>
         <p:nvSpPr>
-          <p:cNvPr id="100025" name="TextBox 4"/>
+          <p:cNvPr id="100030" name="TextBox 4"/>
           <p:cNvSpPr txBox="1"/>
           <p:nvPr/>
         </p:nvSpPr>

--- a/skills/presentations/assets/pptx/templates/03-management-effectiveness.pptx
+++ b/skills/presentations/assets/pptx/templates/03-management-effectiveness.pptx
@@ -5,17 +5,17 @@
     <p:sldMasterId xmlns:r="http://schemas.openxmlformats.org/officeDocument/2006/relationships" id="2147483648" r:id="rId1"/>
   </p:sldMasterIdLst>
   <p:notesMasterIdLst>
-    <p:notesMasterId r:id="Re20d0780d8e8432f"/>
+    <p:notesMasterId r:id="R4f28fec9c3ea48e4"/>
   </p:notesMasterIdLst>
   <p:sldIdLst>
-    <p:sldId id="256" r:id="R6f7825b561c54292"/>
-    <p:sldId id="257" r:id="R16b0c535478d4b17"/>
-    <p:sldId id="258" r:id="R987e75f678ab4ce2"/>
-    <p:sldId id="259" r:id="R5af6318ad3d94834"/>
-    <p:sldId id="260" r:id="Rb31886eb64294b21"/>
-    <p:sldId id="261" r:id="R28b0e7db0b3f4fad"/>
-    <p:sldId id="262" r:id="R9efe4600bab04ada"/>
-    <p:sldId id="263" r:id="R94623730ac84442f"/>
+    <p:sldId id="256" r:id="R47e138ee09864516"/>
+    <p:sldId id="257" r:id="R683fa321a2084bae"/>
+    <p:sldId id="258" r:id="R1621595ac6a94430"/>
+    <p:sldId id="259" r:id="R428d9cfa2b684bb9"/>
+    <p:sldId id="260" r:id="Rfbc1d58c0acf46c1"/>
+    <p:sldId id="261" r:id="Rfcf292f88e3c4ec8"/>
+    <p:sldId id="262" r:id="Ra3f12cb4c9954b63"/>
+    <p:sldId id="263" r:id="Rcb24d9d42d5e4f26"/>
   </p:sldIdLst>
   <p:sldSz cx="12192000" cy="6858000"/>
   <p:notesSz cx="6858000" cy="9144000"/>
@@ -1615,7 +1615,19 @@
                 <a:latin typeface="Calibri"/>
                 <a:ea typeface="Calibri"/>
               </a:rPr>
-              <a:t>In-repo: skills/presentations/classic-public-cases.md</a:t>
+              <a:t>CONTENT TEMPLATE ONLY — do not copy visual design (colors, margins, fonts) as a brand system.</a:t>
+            </a:r>
+          </a:p>
+          <a:p xmlns:a="http://schemas.openxmlformats.org/drawingml/2006/main">
+            <a:r>
+              <a:rPr lang="en-US" sz="1500" b="0">
+                <a:solidFill>
+                  <a:srgbClr val="1A202C"/>
+                </a:solidFill>
+                <a:latin typeface="Calibri"/>
+                <a:ea typeface="Calibri"/>
+              </a:rPr>
+              <a:t>In-repo: skills/presentations/classic-public-cases.md · assets/README.md (agent notice)</a:t>
             </a:r>
           </a:p>
         </p:txBody>
